--- a/keelinjoyce/fos poster/keelinjoyce_fos2026_syeseminar-final.pptx
+++ b/keelinjoyce/fos poster/keelinjoyce_fos2026_syeseminar-final.pptx
@@ -132,28 +132,6 @@
 </p188:authorLst>
 </file>
 
-<file path=ppt/comments/modernComment_100_CAC8111D.xml><?xml version="1.0" encoding="utf-8"?>
-<p188:cmLst xmlns:a="http://schemas.openxmlformats.org/drawingml/2006/main" xmlns:r="http://schemas.openxmlformats.org/officeDocument/2006/relationships" xmlns:p188="http://schemas.microsoft.com/office/powerpoint/2018/8/main">
-  <p188:cm id="{93DB5D02-4641-A246-B262-68EDFDC45DF7}" authorId="{208AC820-044B-0798-D9CC-D44C4EB0E508}" created="2026-04-13T14:52:39.519">
-    <ac:deMkLst xmlns:ac="http://schemas.microsoft.com/office/drawing/2013/main/command">
-      <pc:docMk xmlns:pc="http://schemas.microsoft.com/office/powerpoint/2013/main/command"/>
-      <pc:sldMk xmlns:pc="http://schemas.microsoft.com/office/powerpoint/2013/main/command" cId="3402109213" sldId="256"/>
-      <ac:picMk id="34" creationId="{E775E83E-5044-91E4-9222-29FAB91ADB4A}"/>
-    </ac:deMkLst>
-    <p188:txBody>
-      <a:bodyPr/>
-      <a:lstStyle/>
-      <a:p>
-        <a:r>
-          <a:rPr lang="en-US"/>
-          <a:t>distance from goal</a:t>
-        </a:r>
-      </a:p>
-    </p188:txBody>
-  </p188:cm>
-</p188:cmLst>
-</file>
-
 <file path=ppt/notesMasters/notesMaster1.xml><?xml version="1.0" encoding="utf-8"?>
 <p:notesMaster xmlns:a="http://schemas.openxmlformats.org/drawingml/2006/main" xmlns:r="http://schemas.openxmlformats.org/officeDocument/2006/relationships" xmlns:p="http://schemas.openxmlformats.org/presentationml/2006/main">
   <p:cSld>
@@ -236,7 +214,7 @@
           <a:p>
             <a:fld id="{064C5C40-2CF4-9E43-AD3B-E28128E66910}" type="datetimeFigureOut">
               <a:rPr lang="en-US" smtClean="0"/>
-              <a:t>4/14/2026</a:t>
+              <a:t>4/15/26</a:t>
             </a:fld>
             <a:endParaRPr lang="en-US"/>
           </a:p>
@@ -684,7 +662,7 @@
           <a:p>
             <a:fld id="{B7509B4A-2E11-444A-8FCE-E78873839832}" type="datetimeFigureOut">
               <a:rPr lang="en-CA" smtClean="0"/>
-              <a:t>2026-04-14</a:t>
+              <a:t>2026-04-15</a:t>
             </a:fld>
             <a:endParaRPr lang="en-CA"/>
           </a:p>
@@ -854,7 +832,7 @@
           <a:p>
             <a:fld id="{B7509B4A-2E11-444A-8FCE-E78873839832}" type="datetimeFigureOut">
               <a:rPr lang="en-CA" smtClean="0"/>
-              <a:t>2026-04-14</a:t>
+              <a:t>2026-04-15</a:t>
             </a:fld>
             <a:endParaRPr lang="en-CA"/>
           </a:p>
@@ -1034,7 +1012,7 @@
           <a:p>
             <a:fld id="{B7509B4A-2E11-444A-8FCE-E78873839832}" type="datetimeFigureOut">
               <a:rPr lang="en-CA" smtClean="0"/>
-              <a:t>2026-04-14</a:t>
+              <a:t>2026-04-15</a:t>
             </a:fld>
             <a:endParaRPr lang="en-CA"/>
           </a:p>
@@ -1204,7 +1182,7 @@
           <a:p>
             <a:fld id="{B7509B4A-2E11-444A-8FCE-E78873839832}" type="datetimeFigureOut">
               <a:rPr lang="en-CA" smtClean="0"/>
-              <a:t>2026-04-14</a:t>
+              <a:t>2026-04-15</a:t>
             </a:fld>
             <a:endParaRPr lang="en-CA"/>
           </a:p>
@@ -1450,7 +1428,7 @@
           <a:p>
             <a:fld id="{B7509B4A-2E11-444A-8FCE-E78873839832}" type="datetimeFigureOut">
               <a:rPr lang="en-CA" smtClean="0"/>
-              <a:t>2026-04-14</a:t>
+              <a:t>2026-04-15</a:t>
             </a:fld>
             <a:endParaRPr lang="en-CA"/>
           </a:p>
@@ -1738,7 +1716,7 @@
           <a:p>
             <a:fld id="{B7509B4A-2E11-444A-8FCE-E78873839832}" type="datetimeFigureOut">
               <a:rPr lang="en-CA" smtClean="0"/>
-              <a:t>2026-04-14</a:t>
+              <a:t>2026-04-15</a:t>
             </a:fld>
             <a:endParaRPr lang="en-CA"/>
           </a:p>
@@ -2165,7 +2143,7 @@
           <a:p>
             <a:fld id="{B7509B4A-2E11-444A-8FCE-E78873839832}" type="datetimeFigureOut">
               <a:rPr lang="en-CA" smtClean="0"/>
-              <a:t>2026-04-14</a:t>
+              <a:t>2026-04-15</a:t>
             </a:fld>
             <a:endParaRPr lang="en-CA"/>
           </a:p>
@@ -2283,7 +2261,7 @@
           <a:p>
             <a:fld id="{B7509B4A-2E11-444A-8FCE-E78873839832}" type="datetimeFigureOut">
               <a:rPr lang="en-CA" smtClean="0"/>
-              <a:t>2026-04-14</a:t>
+              <a:t>2026-04-15</a:t>
             </a:fld>
             <a:endParaRPr lang="en-CA"/>
           </a:p>
@@ -2378,7 +2356,7 @@
           <a:p>
             <a:fld id="{B7509B4A-2E11-444A-8FCE-E78873839832}" type="datetimeFigureOut">
               <a:rPr lang="en-CA" smtClean="0"/>
-              <a:t>2026-04-14</a:t>
+              <a:t>2026-04-15</a:t>
             </a:fld>
             <a:endParaRPr lang="en-CA"/>
           </a:p>
@@ -2655,7 +2633,7 @@
           <a:p>
             <a:fld id="{B7509B4A-2E11-444A-8FCE-E78873839832}" type="datetimeFigureOut">
               <a:rPr lang="en-CA" smtClean="0"/>
-              <a:t>2026-04-14</a:t>
+              <a:t>2026-04-15</a:t>
             </a:fld>
             <a:endParaRPr lang="en-CA"/>
           </a:p>
@@ -2908,7 +2886,7 @@
           <a:p>
             <a:fld id="{B7509B4A-2E11-444A-8FCE-E78873839832}" type="datetimeFigureOut">
               <a:rPr lang="en-CA" smtClean="0"/>
-              <a:t>2026-04-14</a:t>
+              <a:t>2026-04-15</a:t>
             </a:fld>
             <a:endParaRPr lang="en-CA"/>
           </a:p>
@@ -3124,7 +3102,7 @@
           <a:p>
             <a:fld id="{B7509B4A-2E11-444A-8FCE-E78873839832}" type="datetimeFigureOut">
               <a:rPr lang="en-CA" smtClean="0"/>
-              <a:t>2026-04-14</a:t>
+              <a:t>2026-04-15</a:t>
             </a:fld>
             <a:endParaRPr lang="en-CA"/>
           </a:p>
@@ -4319,14 +4297,14 @@
           <a:effectLst/>
           <a:extLst>
             <a:ext uri="{909E8E84-426E-40dd-AFC4-6F175D3DCCD1}">
-              <a14:hiddenFill xmlns="" xmlns:a14="http://schemas.microsoft.com/office/drawing/2010/main">
+              <a14:hiddenFill xmlns:a14="http://schemas.microsoft.com/office/drawing/2010/main" xmlns="">
                 <a:solidFill>
                   <a:schemeClr val="accent1"/>
                 </a:solidFill>
               </a14:hiddenFill>
             </a:ext>
             <a:ext uri="{91240B29-F687-4f45-9708-019B960494DF}">
-              <a14:hiddenLine xmlns="" xmlns:a14="http://schemas.microsoft.com/office/drawing/2010/main" w="9525">
+              <a14:hiddenLine xmlns:a14="http://schemas.microsoft.com/office/drawing/2010/main" xmlns="" w="9525">
                 <a:solidFill>
                   <a:schemeClr val="tx1"/>
                 </a:solidFill>
@@ -4336,7 +4314,7 @@
               </a14:hiddenLine>
             </a:ext>
             <a:ext uri="{AF507438-7753-43e0-B8FC-AC1667EBCBE1}">
-              <a14:hiddenEffects xmlns="" xmlns:a14="http://schemas.microsoft.com/office/drawing/2010/main">
+              <a14:hiddenEffects xmlns:a14="http://schemas.microsoft.com/office/drawing/2010/main" xmlns="">
                 <a:effectLst>
                   <a:outerShdw dist="35921" dir="2700000" algn="ctr" rotWithShape="0">
                     <a:schemeClr val="bg2"/>
@@ -4830,19 +4808,7 @@
                 <a:ea typeface="Verdana" panose="020B0604030504040204" pitchFamily="34" charset="0"/>
                 <a:cs typeface="Arial" panose="020B0604020202020204" pitchFamily="34" charset="0"/>
               </a:rPr>
-              <a:t>  </a:t>
-            </a:r>
-            <a:r>
-              <a:rPr lang="en-US" sz="4400" b="1" i="0" u="none" strike="noStrike" dirty="0" smtClean="0">
-                <a:solidFill>
-                  <a:srgbClr val="000000"/>
-                </a:solidFill>
-                <a:effectLst/>
-                <a:latin typeface="Arial" panose="020B0604020202020204" pitchFamily="34" charset="0"/>
-                <a:ea typeface="Verdana" panose="020B0604030504040204" pitchFamily="34" charset="0"/>
-                <a:cs typeface="Arial" panose="020B0604020202020204" pitchFamily="34" charset="0"/>
-              </a:rPr>
-              <a:t>P-values</a:t>
+              <a:t>  P-values</a:t>
             </a:r>
           </a:p>
           <a:p>
@@ -4851,34 +4817,14 @@
               <a:buChar char="•"/>
             </a:pPr>
             <a:r>
-              <a:rPr lang="en-US" sz="3000" dirty="0" smtClean="0">
+              <a:rPr lang="en-US" sz="3000" dirty="0">
                 <a:solidFill>
                   <a:srgbClr val="000000"/>
                 </a:solidFill>
                 <a:latin typeface="Arial" panose="020B0604020202020204" pitchFamily="34" charset="0"/>
                 <a:cs typeface="Arial" panose="020B0604020202020204" pitchFamily="34" charset="0"/>
               </a:rPr>
-              <a:t>Because </a:t>
-            </a:r>
-            <a:r>
-              <a:rPr lang="en-US" sz="3000" dirty="0">
-                <a:solidFill>
-                  <a:srgbClr val="000000"/>
-                </a:solidFill>
-                <a:latin typeface="Arial" panose="020B0604020202020204" pitchFamily="34" charset="0"/>
-                <a:cs typeface="Arial" panose="020B0604020202020204" pitchFamily="34" charset="0"/>
-              </a:rPr>
-              <a:t>there are 14 groups each being compared with each other, there are too many p-values to easily sort through individual </a:t>
-            </a:r>
-            <a:r>
-              <a:rPr lang="en-US" sz="3000" dirty="0" smtClean="0">
-                <a:solidFill>
-                  <a:srgbClr val="000000"/>
-                </a:solidFill>
-                <a:latin typeface="Arial" panose="020B0604020202020204" pitchFamily="34" charset="0"/>
-                <a:cs typeface="Arial" panose="020B0604020202020204" pitchFamily="34" charset="0"/>
-              </a:rPr>
-              <a:t>results.</a:t>
+              <a:t>Because there are 14 groups each being compared with each other, there are too many p-values to easily sort through individual results.</a:t>
             </a:r>
           </a:p>
           <a:p>
@@ -4887,7 +4833,7 @@
               <a:buChar char="•"/>
             </a:pPr>
             <a:r>
-              <a:rPr lang="en-US" sz="3000" i="0" u="none" strike="noStrike" dirty="0" smtClean="0">
+              <a:rPr lang="en-US" sz="3000" i="0" u="none" strike="noStrike" dirty="0">
                 <a:solidFill>
                   <a:srgbClr val="000000"/>
                 </a:solidFill>
@@ -4895,18 +4841,7 @@
                 <a:latin typeface="Arial" panose="020B0604020202020204" pitchFamily="34" charset="0"/>
                 <a:cs typeface="Arial" panose="020B0604020202020204" pitchFamily="34" charset="0"/>
               </a:rPr>
-              <a:t>The </a:t>
-            </a:r>
-            <a:r>
-              <a:rPr lang="en-US" sz="3000" i="0" u="none" strike="noStrike" dirty="0">
-                <a:solidFill>
-                  <a:srgbClr val="000000"/>
-                </a:solidFill>
-                <a:effectLst/>
-                <a:latin typeface="Arial" panose="020B0604020202020204" pitchFamily="34" charset="0"/>
-                <a:cs typeface="Arial" panose="020B0604020202020204" pitchFamily="34" charset="0"/>
-              </a:rPr>
-              <a:t>boxplot and heatmap of significant values show there is a general curved trend in lifting capacity between age classes meaning that there is a peak in performance and then a decline where older and younger groups are not discernible.</a:t>
+              <a:t>The boxplot and heatmap of significant values show there is a general curved trend in lifting capacity between age classes meaning that there is a peak in performance and then a decline where older and younger groups are not discernible.</a:t>
             </a:r>
             <a:endParaRPr lang="en-US" sz="3000" i="0" u="none" strike="noStrike" dirty="0">
               <a:solidFill>
@@ -4946,14 +4881,14 @@
           </a:ln>
           <a:extLst>
             <a:ext uri="{909E8E84-426E-40dd-AFC4-6F175D3DCCD1}">
-              <a14:hiddenFill xmlns="" xmlns:a14="http://schemas.microsoft.com/office/drawing/2010/main">
+              <a14:hiddenFill xmlns:a14="http://schemas.microsoft.com/office/drawing/2010/main" xmlns="">
                 <a:solidFill>
                   <a:srgbClr val="FFFFFF"/>
                 </a:solidFill>
               </a14:hiddenFill>
             </a:ext>
             <a:ext uri="{91240B29-F687-4f45-9708-019B960494DF}">
-              <a14:hiddenLine xmlns="" xmlns:a14="http://schemas.microsoft.com/office/drawing/2010/main" w="9525">
+              <a14:hiddenLine xmlns:a14="http://schemas.microsoft.com/office/drawing/2010/main" xmlns="" w="9525">
                 <a:solidFill>
                   <a:srgbClr val="000000"/>
                 </a:solidFill>
@@ -5110,14 +5045,14 @@
           </a:ln>
           <a:extLst>
             <a:ext uri="{909E8E84-426E-40dd-AFC4-6F175D3DCCD1}">
-              <a14:hiddenFill xmlns="" xmlns:a14="http://schemas.microsoft.com/office/drawing/2010/main">
+              <a14:hiddenFill xmlns:a14="http://schemas.microsoft.com/office/drawing/2010/main" xmlns="">
                 <a:solidFill>
                   <a:srgbClr val="FFFFFF"/>
                 </a:solidFill>
               </a14:hiddenFill>
             </a:ext>
             <a:ext uri="{91240B29-F687-4f45-9708-019B960494DF}">
-              <a14:hiddenLine xmlns="" xmlns:a14="http://schemas.microsoft.com/office/drawing/2010/main" w="9525">
+              <a14:hiddenLine xmlns:a14="http://schemas.microsoft.com/office/drawing/2010/main" xmlns="" w="9525">
                 <a:solidFill>
                   <a:srgbClr val="000000"/>
                 </a:solidFill>
@@ -5450,8 +5385,8 @@
           </a:p>
         </p:txBody>
       </p:sp>
-      <mc:AlternateContent xmlns:mc="http://schemas.openxmlformats.org/markup-compatibility/2006">
-        <mc:Choice xmlns:a14="http://schemas.microsoft.com/office/drawing/2010/main" Requires="a14">
+      <mc:AlternateContent xmlns:mc="http://schemas.openxmlformats.org/markup-compatibility/2006" xmlns:a14="http://schemas.microsoft.com/office/drawing/2010/main">
+        <mc:Choice Requires="a14">
           <p:sp>
             <p:nvSpPr>
               <p:cNvPr id="36" name="Rectangle 35">
@@ -5505,7 +5440,7 @@
                     <a:spcPts val="0"/>
                   </a:spcAft>
                 </a:pPr>
-                <a:endParaRPr lang="en-US" sz="2800" b="0" i="0" u="none" strike="noStrike" dirty="0" smtClean="0">
+                <a:endParaRPr lang="en-US" sz="2800" b="0" i="0" u="none" strike="noStrike" dirty="0">
                   <a:solidFill>
                     <a:srgbClr val="000000"/>
                   </a:solidFill>
@@ -5694,7 +5629,7 @@
               <a:p>
                 <a:pPr fontAlgn="base"/>
                 <a:r>
-                  <a:rPr lang="en-US" sz="3600" b="0" u="none" strike="noStrike" dirty="0" smtClean="0">
+                  <a:rPr lang="en-US" sz="3600" b="0" u="none" strike="noStrike" dirty="0">
                     <a:solidFill>
                       <a:srgbClr val="000000"/>
                     </a:solidFill>
@@ -5705,7 +5640,7 @@
                   <a:t>     w</a:t>
                 </a:r>
                 <a:r>
-                  <a:rPr lang="en-US" sz="3000" dirty="0" smtClean="0">
+                  <a:rPr lang="en-US" sz="3000" dirty="0">
                     <a:solidFill>
                       <a:srgbClr val="000000"/>
                     </a:solidFill>
@@ -5716,7 +5651,7 @@
                   <a:t>here </a:t>
                 </a:r>
                 <a:r>
-                  <a:rPr lang="en-US" sz="3000" i="1" dirty="0" smtClean="0">
+                  <a:rPr lang="en-US" sz="3000" i="1" dirty="0">
                     <a:solidFill>
                       <a:srgbClr val="000000"/>
                     </a:solidFill>
@@ -5727,7 +5662,7 @@
                   <a:t>N</a:t>
                 </a:r>
                 <a:r>
-                  <a:rPr lang="en-US" sz="3000" dirty="0" smtClean="0">
+                  <a:rPr lang="en-US" sz="3000" dirty="0">
                     <a:solidFill>
                       <a:srgbClr val="000000"/>
                     </a:solidFill>
@@ -5782,7 +5717,7 @@
                   </m:oMath>
                 </a14:m>
                 <a:r>
-                  <a:rPr lang="en-US" sz="3000" dirty="0" smtClean="0">
+                  <a:rPr lang="en-US" sz="3000" dirty="0">
                     <a:solidFill>
                       <a:srgbClr val="000000"/>
                     </a:solidFill>
@@ -5793,7 +5728,7 @@
                   <a:t> is sample size for the </a:t>
                 </a:r>
                 <a:r>
-                  <a:rPr lang="en-US" sz="3000" dirty="0" err="1" smtClean="0">
+                  <a:rPr lang="en-US" sz="3000" dirty="0" err="1">
                     <a:solidFill>
                       <a:srgbClr val="000000"/>
                     </a:solidFill>
@@ -5804,7 +5739,7 @@
                   <a:t>i-th</a:t>
                 </a:r>
                 <a:r>
-                  <a:rPr lang="en-US" sz="3000" dirty="0" smtClean="0">
+                  <a:rPr lang="en-US" sz="3000" dirty="0">
                     <a:solidFill>
                       <a:srgbClr val="000000"/>
                     </a:solidFill>
@@ -5887,20 +5822,8 @@
                   </a:rPr>
                   <a:t> is the sum of </a:t>
                 </a:r>
-                <a:r>
-                  <a:rPr lang="en-US" sz="3000" b="0" i="0" u="none" strike="noStrike" dirty="0" smtClean="0">
-                    <a:solidFill>
-                      <a:srgbClr val="000000"/>
-                    </a:solidFill>
-                    <a:effectLst/>
-                    <a:latin typeface="Arial" panose="020B0604020202020204" pitchFamily="34" charset="0"/>
-                    <a:ea typeface="Lato" panose="020F0502020204030203" pitchFamily="34" charset="0"/>
-                    <a:cs typeface="Arial" panose="020B0604020202020204" pitchFamily="34" charset="0"/>
-                  </a:rPr>
-                  <a:t/>
-                </a:r>
                 <a:br>
-                  <a:rPr lang="en-US" sz="3000" b="0" i="0" u="none" strike="noStrike" dirty="0" smtClean="0">
+                  <a:rPr lang="en-US" sz="3000" b="0" i="0" u="none" strike="noStrike" dirty="0">
                     <a:solidFill>
                       <a:srgbClr val="000000"/>
                     </a:solidFill>
@@ -5911,18 +5834,6 @@
                   </a:rPr>
                 </a:br>
                 <a:r>
-                  <a:rPr lang="en-US" sz="3000" b="0" i="0" u="none" strike="noStrike" dirty="0" smtClean="0">
-                    <a:solidFill>
-                      <a:srgbClr val="000000"/>
-                    </a:solidFill>
-                    <a:effectLst/>
-                    <a:latin typeface="Arial" panose="020B0604020202020204" pitchFamily="34" charset="0"/>
-                    <a:ea typeface="Lato" panose="020F0502020204030203" pitchFamily="34" charset="0"/>
-                    <a:cs typeface="Arial" panose="020B0604020202020204" pitchFamily="34" charset="0"/>
-                  </a:rPr>
-                  <a:t>     ranks </a:t>
-                </a:r>
-                <a:r>
                   <a:rPr lang="en-US" sz="3000" b="0" i="0" u="none" strike="noStrike" dirty="0">
                     <a:solidFill>
                       <a:srgbClr val="000000"/>
@@ -5932,7 +5843,7 @@
                     <a:ea typeface="Lato" panose="020F0502020204030203" pitchFamily="34" charset="0"/>
                     <a:cs typeface="Arial" panose="020B0604020202020204" pitchFamily="34" charset="0"/>
                   </a:rPr>
-                  <a:t>in the </a:t>
+                  <a:t>     ranks in the </a:t>
                 </a:r>
                 <a:r>
                   <a:rPr lang="en-US" sz="3000" b="0" i="0" u="none" strike="noStrike" dirty="0" err="1">
@@ -5956,21 +5867,9 @@
                     <a:ea typeface="Lato" panose="020F0502020204030203" pitchFamily="34" charset="0"/>
                     <a:cs typeface="Arial" panose="020B0604020202020204" pitchFamily="34" charset="0"/>
                   </a:rPr>
-                  <a:t> group and k is the number of groups</a:t>
+                  <a:t> group and k is the number of groups.</a:t>
                 </a:r>
-                <a:r>
-                  <a:rPr lang="en-US" sz="3000" b="0" i="0" u="none" strike="noStrike" dirty="0" smtClean="0">
-                    <a:solidFill>
-                      <a:srgbClr val="000000"/>
-                    </a:solidFill>
-                    <a:effectLst/>
-                    <a:latin typeface="Arial" panose="020B0604020202020204" pitchFamily="34" charset="0"/>
-                    <a:ea typeface="Lato" panose="020F0502020204030203" pitchFamily="34" charset="0"/>
-                    <a:cs typeface="Arial" panose="020B0604020202020204" pitchFamily="34" charset="0"/>
-                  </a:rPr>
-                  <a:t>.</a:t>
-                </a:r>
-                <a:endParaRPr lang="en-US" sz="3000" dirty="0" smtClean="0">
+                <a:endParaRPr lang="en-US" sz="3000" dirty="0">
                   <a:solidFill>
                     <a:srgbClr val="000000"/>
                   </a:solidFill>
@@ -5991,7 +5890,7 @@
                   <a:buChar char="•"/>
                 </a:pPr>
                 <a:r>
-                  <a:rPr lang="en-US" sz="3000" b="0" i="0" u="none" strike="noStrike" dirty="0" smtClean="0">
+                  <a:rPr lang="en-US" sz="3000" b="0" i="0" u="none" strike="noStrike" dirty="0">
                     <a:solidFill>
                       <a:srgbClr val="000000"/>
                     </a:solidFill>
@@ -6003,7 +5902,7 @@
                   <a:t>The test resulted in p-value &lt; </a:t>
                 </a:r>
                 <a:r>
-                  <a:rPr lang="en-US" sz="3000" dirty="0" smtClean="0">
+                  <a:rPr lang="en-US" sz="3000" dirty="0">
                     <a:solidFill>
                       <a:srgbClr val="000000"/>
                     </a:solidFill>
@@ -6014,7 +5913,7 @@
                   <a:t>0.001</a:t>
                 </a:r>
                 <a:r>
-                  <a:rPr lang="en-US" sz="3000" b="0" i="0" u="none" strike="noStrike" dirty="0" smtClean="0">
+                  <a:rPr lang="en-US" sz="3000" b="0" i="0" u="none" strike="noStrike" dirty="0">
                     <a:solidFill>
                       <a:srgbClr val="000000"/>
                     </a:solidFill>
@@ -6025,20 +5924,11 @@
                   </a:rPr>
                   <a:t> indicating at least one group is statistically discernible from another and we should reject the null hypothesis.</a:t>
                 </a:r>
-                <a:endParaRPr lang="en-US" sz="3000" b="0" i="0" u="none" strike="noStrike" dirty="0">
-                  <a:solidFill>
-                    <a:srgbClr val="000000"/>
-                  </a:solidFill>
-                  <a:effectLst/>
-                  <a:latin typeface="Arial" panose="020B0604020202020204" pitchFamily="34" charset="0"/>
-                  <a:ea typeface="Lato" panose="020F0502020204030203" pitchFamily="34" charset="0"/>
-                  <a:cs typeface="Arial" panose="020B0604020202020204" pitchFamily="34" charset="0"/>
-                </a:endParaRPr>
               </a:p>
             </p:txBody>
           </p:sp>
         </mc:Choice>
-        <mc:Fallback>
+        <mc:Fallback xmlns="">
           <p:sp>
             <p:nvSpPr>
               <p:cNvPr id="36" name="Rectangle 35">
@@ -6114,14 +6004,14 @@
           </a:ln>
           <a:extLst>
             <a:ext uri="{909E8E84-426E-40dd-AFC4-6F175D3DCCD1}">
-              <a14:hiddenFill xmlns="" xmlns:a14="http://schemas.microsoft.com/office/drawing/2010/main">
+              <a14:hiddenFill xmlns:a14="http://schemas.microsoft.com/office/drawing/2010/main" xmlns="">
                 <a:solidFill>
                   <a:srgbClr val="FFFFFF"/>
                 </a:solidFill>
               </a14:hiddenFill>
             </a:ext>
             <a:ext uri="{91240B29-F687-4f45-9708-019B960494DF}">
-              <a14:hiddenLine xmlns="" xmlns:a14="http://schemas.microsoft.com/office/drawing/2010/main" w="9525">
+              <a14:hiddenLine xmlns:a14="http://schemas.microsoft.com/office/drawing/2010/main" xmlns="" w="9525">
                 <a:solidFill>
                   <a:srgbClr val="000000"/>
                 </a:solidFill>
@@ -7011,14 +6901,14 @@
           </a:ln>
           <a:extLst>
             <a:ext uri="{909E8E84-426E-40dd-AFC4-6F175D3DCCD1}">
-              <a14:hiddenFill xmlns="" xmlns:a14="http://schemas.microsoft.com/office/drawing/2010/main">
+              <a14:hiddenFill xmlns:a14="http://schemas.microsoft.com/office/drawing/2010/main" xmlns="">
                 <a:solidFill>
                   <a:srgbClr val="FFFFFF"/>
                 </a:solidFill>
               </a14:hiddenFill>
             </a:ext>
             <a:ext uri="{91240B29-F687-4f45-9708-019B960494DF}">
-              <a14:hiddenLine xmlns="" xmlns:a14="http://schemas.microsoft.com/office/drawing/2010/main" w="9525">
+              <a14:hiddenLine xmlns:a14="http://schemas.microsoft.com/office/drawing/2010/main" xmlns="" w="9525">
                 <a:solidFill>
                   <a:srgbClr val="000000"/>
                 </a:solidFill>
@@ -7872,14 +7762,14 @@
           </a:ln>
           <a:extLst>
             <a:ext uri="{909E8E84-426E-40dd-AFC4-6F175D3DCCD1}">
-              <a14:hiddenFill xmlns="" xmlns:a14="http://schemas.microsoft.com/office/drawing/2010/main">
+              <a14:hiddenFill xmlns:a14="http://schemas.microsoft.com/office/drawing/2010/main" xmlns="">
                 <a:solidFill>
                   <a:srgbClr val="FFFFFF"/>
                 </a:solidFill>
               </a14:hiddenFill>
             </a:ext>
             <a:ext uri="{91240B29-F687-4f45-9708-019B960494DF}">
-              <a14:hiddenLine xmlns="" xmlns:a14="http://schemas.microsoft.com/office/drawing/2010/main" w="9525">
+              <a14:hiddenLine xmlns:a14="http://schemas.microsoft.com/office/drawing/2010/main" xmlns="" w="9525">
                 <a:solidFill>
                   <a:srgbClr val="000000"/>
                 </a:solidFill>
@@ -8018,11 +7908,6 @@
   <p:clrMapOvr>
     <a:masterClrMapping/>
   </p:clrMapOvr>
-  <p:extLst mod="1">
-    <p:ext uri="{6950BFC3-D8DA-4A85-94F7-54DA5524770B}">
-      <p188:commentRel xmlns:p188="http://schemas.microsoft.com/office/powerpoint/2018/8/main" xmlns="" r:id="rId15"/>
-    </p:ext>
-  </p:extLst>
 </p:sld>
 </file>
 
